--- a/docs/발표_초안.pptx
+++ b/docs/발표_초안.pptx
@@ -588,12 +588,22 @@
           <a:lstStyle/>
           <a:p>
             <a:r>
-              <a:t>[수치 규율] 스윕 검출 수치는 파일럿 완료 전엔 절대 말하지 않는다(구조까지만). -35%는 '병목 3구간' 한정 — 총 소요 과장 금지.</a:t>
-            </a:r>
-          </a:p>
-          <a:p>
-            <a:r>
-              <a:t>출처: _workspace/01·02, eval/violation_sweep/pilot50_seed42/, 제안서 p.16. 여유 시 예선 리더보드 1위 0.8096 언급.</a:t>
+              <a:t>[수치 규율] 88건은 '위반 신호'(INSUFFICIENT 다수 = 심사자 검토 필요) — 확정위반 30건과 반드시 구분해 말한다. 심의필 누락 수치는 크롤링 텍스트 캡처 한계 가능성 → 단정 금지. 실패 12건은 파이프라인 프롬프트 팽창(컨텍스트 한계)이 원인 — 개선 항목으로 먼저 밝혀도 좋다. -35%는 '병목 3구간' 한정 — 총 소요 과장 금지.</a:t>
+            </a:r>
+          </a:p>
+          <a:p>
+            <a:r>
+              <a:t>혐오표현 질문 → 'Track C 활성화: UnSmile 기반 6개 리스크 축, 판정마다 선례 인용, clean 오탐 0 스모크 통과. 잡습니다.' (UnSmile 비상업 라이선스 — 상업 배포 시 K-MHaS 교체 예정)</a:t>
+            </a:r>
+          </a:p>
+          <a:p>
+            <a:r>
+              <a:t>멘트: '표본을 2배로 늘려도 패턴이 유지됩니다.'</a:t>
+            </a:r>
+          </a:p>
+          <a:p>
+            <a:r>
+              <a:t>출처: eval/violation_sweep/pilot50_seed42/report.md, _workspace_eval/03_extended_summary.md, _workspace_trackc/02_smoke_summary.md, _workspace/01·02, 제안서 p.16. 여유 시 리더보드 1위 0.8096.</a:t>
             </a:r>
           </a:p>
         </p:txBody>
@@ -5141,7 +5151,7 @@
                   <a:srgbClr val="2563EB"/>
                 </a:solidFill>
               </a:rPr>
-              <a:t>실상품 위반 탐지 스윕 — 진행 중</a:t>
+              <a:t>실상품 위반 탐지 스윕 — 완료 (100건)</a:t>
             </a:r>
           </a:p>
           <a:p>
@@ -5151,12 +5161,12 @@
               </a:spcAft>
             </a:pPr>
             <a:r>
-              <a:rPr sz="1200" b="0">
+              <a:rPr sz="1100" b="0">
                 <a:solidFill>
                   <a:srgbClr val="12325C"/>
                 </a:solidFill>
               </a:rPr>
-              <a:t>국민·하나·전북·우리·신한 실제 광고 2,163건</a:t>
+              <a:t>국민·하나·전북·우리·신한 실광고 2,163건 중 층화 100건</a:t>
             </a:r>
           </a:p>
           <a:p>
@@ -5166,12 +5176,12 @@
               </a:spcAft>
             </a:pPr>
             <a:r>
-              <a:rPr sz="1200" b="0">
+              <a:rPr sz="1100" b="0">
                 <a:solidFill>
                   <a:srgbClr val="12325C"/>
                 </a:solidFill>
               </a:rPr>
-              <a:t>층화 표본 50건 파일럿 실행 중</a:t>
+              <a:t>완료 88건 전건 위반 신호 검출 (100%, 전 은행 동일)</a:t>
             </a:r>
           </a:p>
           <a:p>
@@ -5181,12 +5191,12 @@
               </a:spcAft>
             </a:pPr>
             <a:r>
-              <a:rPr sz="1200" b="0">
+              <a:rPr sz="1100" b="0">
                 <a:solidFill>
                   <a:srgbClr val="12325C"/>
                 </a:solidFill>
               </a:rPr>
-              <a:t>결과: 위반 M건 검출  [파일럿 완료 후 기입]</a:t>
+              <a:t>확정위반 30건(34%) · 총 판정 804건 · Track B 76/88</a:t>
             </a:r>
           </a:p>
           <a:p>
@@ -5196,12 +5206,27 @@
               </a:spcAft>
             </a:pPr>
             <a:r>
-              <a:rPr sz="1200" b="0">
+              <a:rPr sz="1100" b="0">
                 <a:solidFill>
                   <a:srgbClr val="12325C"/>
                 </a:solidFill>
               </a:rPr>
-              <a:t>리포트: 은행별 검출률·원칙별 분포·근거 조문 인용</a:t>
+              <a:t>대표: "경품 100% 지급"·"원하는 경품 모두" (금소법 시행령 §20①-3·①-5)</a:t>
+            </a:r>
+          </a:p>
+          <a:p>
+            <a:pPr algn="l">
+              <a:spcAft>
+                <a:spcPts val="300"/>
+              </a:spcAft>
+            </a:pPr>
+            <a:r>
+              <a:rPr sz="1100" b="0">
+                <a:solidFill>
+                  <a:srgbClr val="12325C"/>
+                </a:solidFill>
+              </a:rPr>
+              <a:t>표본 50→100 확장에도 분포 유지 · 실패 12건 정직 보고</a:t>
             </a:r>
           </a:p>
         </p:txBody>
@@ -5274,7 +5299,7 @@
                   <a:srgbClr val="12325C"/>
                 </a:solidFill>
               </a:rPr>
-              <a:t>스윕 결과 차트 자리 — 은행별 검출률 막대 + 원칙별 분포 (파일럿 완료 후 제작). 미완료 시 이 박스에 '파일럿 진행 중' 표기 + KR/KH 콘솔 병치 캡처로 대체</a:t>
+              <a:t>스윕 결과 차트 — 은행별 검출(88/88) 막대 + 원칙별 분포 도넛(광고규제 70%·설명의무 17%·부당권유 8%)</a:t>
             </a:r>
           </a:p>
           <a:p>
@@ -5289,7 +5314,7 @@
                   <a:srgbClr val="6B7280"/>
                 </a:solidFill>
               </a:rPr>
-              <a:t>eval/violation_sweep/pilot50_seed42/ 리포트 산출물 · 다국어는 KR/KH 화면 캡처</a:t>
+              <a:t>report.md §1~§3 표에서 제작 (eval/violation_sweep/pilot50_seed42/)</a:t>
             </a:r>
           </a:p>
         </p:txBody>
@@ -5327,7 +5352,7 @@
                   <a:srgbClr val="DC2626"/>
                 </a:solidFill>
               </a:rPr>
-              <a:t>So-what |  재현율 0.92 = 봐야 할 심의기준 후보의 92% 회수, 접지율 1.00 = 근거 없는 판정은 한 건도 내보내지 않는다.</a:t>
+              <a:t>So-what |  이미 시장에 나간 실광고에서도 확정위반 30건을 근거 조문과 함께 짚었다 — 접지율 1.00 = 근거 없는 판정은 한 건도 없다.</a:t>
             </a:r>
           </a:p>
         </p:txBody>
